--- a/doc/Presentation.pptx
+++ b/doc/Presentation.pptx
@@ -121,7 +121,7 @@
 <file path=ppt/revisionInfo.xml><?xml version="1.0" encoding="utf-8"?>
 <p1510:revInfo xmlns:a="http://schemas.openxmlformats.org/drawingml/2006/main" xmlns:r="http://schemas.openxmlformats.org/officeDocument/2006/relationships" xmlns:p1510="http://schemas.microsoft.com/office/powerpoint/2015/10/main">
   <p1510:revLst>
-    <p1510:client id="{0301DDD5-4869-02B0-08DA-48FCD54B453B}" v="1001" dt="2026-05-29T07:41:45.180"/>
+    <p1510:client id="{0301DDD5-4869-02B0-08DA-48FCD54B453B}" v="1022" dt="2026-05-29T08:43:05.646"/>
   </p1510:revLst>
 </p1510:revInfo>
 </file>
@@ -6925,7 +6925,7 @@
           </a:xfrm>
         </p:spPr>
         <p:txBody>
-          <a:bodyPr vert="horz" lIns="91440" tIns="45720" rIns="91440" bIns="45720" rtlCol="0">
+          <a:bodyPr vert="horz" lIns="91440" tIns="45720" rIns="91440" bIns="45720" rtlCol="0" anchor="t">
             <a:normAutofit/>
           </a:bodyPr>
           <a:lstStyle/>
@@ -6964,6 +6964,17 @@
               <a:rPr lang="cs-CZ" sz="2200"/>
               <a:t>MyBargraph – knihovna pro bargraph, zobrazování diod, zobrazení skóre v binárce</a:t>
             </a:r>
+          </a:p>
+          <a:p>
+            <a:pPr lvl="1">
+              <a:buFont typeface="Courier New" panose="020B0604020202020204" pitchFamily="34" charset="0"/>
+              <a:buChar char="o"/>
+            </a:pPr>
+            <a:r>
+              <a:rPr lang="cs-CZ" sz="2200"/>
+              <a:t>MySysTick – knihovna používáná na vnitřní odčitač SysTick</a:t>
+            </a:r>
+            <a:endParaRPr lang="cs-CZ" sz="2200" dirty="0"/>
           </a:p>
         </p:txBody>
       </p:sp>
